--- a/Memoria/Presentacio_TFG.pptx
+++ b/Memoria/Presentacio_TFG.pptx
@@ -20,10 +20,10 @@
     <p:sldId id="263" r:id="rId11"/>
     <p:sldId id="264" r:id="rId12"/>
     <p:sldId id="265" r:id="rId13"/>
-    <p:sldId id="266" r:id="rId14"/>
-    <p:sldId id="267" r:id="rId15"/>
-    <p:sldId id="268" r:id="rId16"/>
-    <p:sldId id="269" r:id="rId17"/>
+    <p:sldId id="267" r:id="rId14"/>
+    <p:sldId id="268" r:id="rId15"/>
+    <p:sldId id="269" r:id="rId16"/>
+    <p:sldId id="266" r:id="rId17"/>
     <p:sldId id="270" r:id="rId18"/>
   </p:sldIdLst>
   <p:sldSz cx="12192000" cy="6858000"/>
@@ -2695,14 +2695,14 @@
               <a:buNone/>
             </a:pPr>
             <a:r>
-              <a:rPr lang="ca-ES" sz="700" noProof="0" dirty="0">
+              <a:rPr lang="ca-ES" sz="1200" noProof="0" dirty="0">
                 <a:solidFill>
                   <a:srgbClr val="6B7280"/>
                 </a:solidFill>
               </a:rPr>
               <a:t>10</a:t>
             </a:r>
-            <a:endParaRPr lang="ca-ES" sz="700" noProof="0" dirty="0"/>
+            <a:endParaRPr lang="ca-ES" sz="1200" noProof="0" dirty="0"/>
           </a:p>
         </p:txBody>
       </p:sp>
@@ -2739,31 +2739,6 @@
           <a:chExt cx="0" cy="0"/>
         </a:xfrm>
       </p:grpSpPr>
-      <p:pic>
-        <p:nvPicPr>
-          <p:cNvPr id="9" name="Image 1" descr="/mnt/data/tfg_assets/crops/hyper_mnist.png"/>
-          <p:cNvPicPr>
-            <a:picLocks noChangeAspect="1"/>
-          </p:cNvPicPr>
-          <p:nvPr/>
-        </p:nvPicPr>
-        <p:blipFill>
-          <a:blip r:embed="rId3"/>
-          <a:srcRect t="1749" b="1"/>
-          <a:stretch>
-            <a:fillRect/>
-          </a:stretch>
-        </p:blipFill>
-        <p:spPr>
-          <a:xfrm>
-            <a:off x="8198327" y="2310384"/>
-            <a:ext cx="2887249" cy="3765110"/>
-          </a:xfrm>
-          <a:prstGeom prst="rect">
-            <a:avLst/>
-          </a:prstGeom>
-        </p:spPr>
-      </p:pic>
       <p:sp>
         <p:nvSpPr>
           <p:cNvPr id="2" name="Text 0"/>
@@ -2898,7 +2873,7 @@
           <p:nvPr/>
         </p:nvPicPr>
         <p:blipFill>
-          <a:blip r:embed="rId4"/>
+          <a:blip r:embed="rId3"/>
           <a:stretch>
             <a:fillRect/>
           </a:stretch>
@@ -2951,84 +2926,6 @@
       </p:sp>
       <p:sp>
         <p:nvSpPr>
-          <p:cNvPr id="8" name="Shape 5"/>
-          <p:cNvSpPr/>
-          <p:nvPr/>
-        </p:nvSpPr>
-        <p:spPr>
-          <a:xfrm>
-            <a:off x="8077202" y="2206752"/>
-            <a:ext cx="2874262" cy="3429000"/>
-          </a:xfrm>
-          <a:prstGeom prst="rect">
-            <a:avLst/>
-          </a:prstGeom>
-          <a:solidFill>
-            <a:srgbClr val="FFFFFF">
-              <a:alpha val="0"/>
-            </a:srgbClr>
-          </a:solidFill>
-          <a:ln w="12700">
-            <a:solidFill>
-              <a:srgbClr val="D7DEE8"/>
-            </a:solidFill>
-            <a:prstDash val="solid"/>
-          </a:ln>
-        </p:spPr>
-        <p:txBody>
-          <a:bodyPr/>
-          <a:lstStyle/>
-          <a:p>
-            <a:endParaRPr lang="ca-ES" noProof="0" dirty="0"/>
-          </a:p>
-        </p:txBody>
-      </p:sp>
-      <p:sp>
-        <p:nvSpPr>
-          <p:cNvPr id="10" name="Text 6"/>
-          <p:cNvSpPr/>
-          <p:nvPr/>
-        </p:nvSpPr>
-        <p:spPr>
-          <a:xfrm>
-            <a:off x="7498080" y="5663184"/>
-            <a:ext cx="4160520" cy="146304"/>
-          </a:xfrm>
-          <a:prstGeom prst="rect">
-            <a:avLst/>
-          </a:prstGeom>
-          <a:noFill/>
-          <a:ln/>
-        </p:spPr>
-        <p:txBody>
-          <a:bodyPr wrap="square" lIns="0" tIns="0" rIns="0" bIns="0" rtlCol="0" anchor="ctr"/>
-          <a:lstStyle/>
-          <a:p>
-            <a:pPr marL="0" indent="0" algn="ctr">
-              <a:buNone/>
-            </a:pPr>
-            <a:r>
-              <a:rPr lang="ca-ES" sz="750" noProof="0" dirty="0" err="1">
-                <a:solidFill>
-                  <a:srgbClr val="6B7280"/>
-                </a:solidFill>
-              </a:rPr>
-              <a:t>Hiperparàmetres</a:t>
-            </a:r>
-            <a:r>
-              <a:rPr lang="ca-ES" sz="750" noProof="0" dirty="0">
-                <a:solidFill>
-                  <a:srgbClr val="6B7280"/>
-                </a:solidFill>
-              </a:rPr>
-              <a:t> del cas MNIST</a:t>
-            </a:r>
-            <a:endParaRPr lang="ca-ES" sz="750" noProof="0" dirty="0"/>
-          </a:p>
-        </p:txBody>
-      </p:sp>
-      <p:sp>
-        <p:nvSpPr>
           <p:cNvPr id="11" name="Text 7"/>
           <p:cNvSpPr/>
           <p:nvPr/>
@@ -3209,12 +3106,59 @@
               <a:buNone/>
             </a:pPr>
             <a:r>
-              <a:rPr lang="ca-ES" sz="700" noProof="0" dirty="0"/>
+              <a:rPr lang="ca-ES" sz="1200" noProof="0" dirty="0"/>
               <a:t>11</a:t>
             </a:r>
           </a:p>
         </p:txBody>
       </p:sp>
+      <p:pic>
+        <p:nvPicPr>
+          <p:cNvPr id="1026" name="Picture 2" descr="mnist | TensorFlow Datasets">
+            <a:extLst>
+              <a:ext uri="{FF2B5EF4-FFF2-40B4-BE49-F238E27FC236}">
+                <a16:creationId xmlns:a16="http://schemas.microsoft.com/office/drawing/2014/main" id="{618A3D7E-85FF-85D7-3EF6-37EA23DD8456}"/>
+              </a:ext>
+            </a:extLst>
+          </p:cNvPr>
+          <p:cNvPicPr>
+            <a:picLocks noChangeAspect="1" noChangeArrowheads="1"/>
+          </p:cNvPicPr>
+          <p:nvPr/>
+        </p:nvPicPr>
+        <p:blipFill>
+          <a:blip r:embed="rId4">
+            <a:extLst>
+              <a:ext uri="{28A0092B-C50C-407E-A947-70E740481C1C}">
+                <a14:useLocalDpi xmlns:a14="http://schemas.microsoft.com/office/drawing/2010/main" val="0"/>
+              </a:ext>
+            </a:extLst>
+          </a:blip>
+          <a:srcRect/>
+          <a:stretch>
+            <a:fillRect/>
+          </a:stretch>
+        </p:blipFill>
+        <p:spPr bwMode="auto">
+          <a:xfrm>
+            <a:off x="7499919" y="2152338"/>
+            <a:ext cx="3914842" cy="3914842"/>
+          </a:xfrm>
+          <a:prstGeom prst="rect">
+            <a:avLst/>
+          </a:prstGeom>
+          <a:noFill/>
+          <a:extLst>
+            <a:ext uri="{909E8E84-426E-40DD-AFC4-6F175D3DCCD1}">
+              <a14:hiddenFill xmlns:a14="http://schemas.microsoft.com/office/drawing/2010/main">
+                <a:solidFill>
+                  <a:srgbClr val="FFFFFF"/>
+                </a:solidFill>
+              </a14:hiddenFill>
+            </a:ext>
+          </a:extLst>
+        </p:spPr>
+      </p:pic>
     </p:spTree>
   </p:cSld>
   <p:clrMapOvr>
@@ -3566,14 +3510,14 @@
               <a:buNone/>
             </a:pPr>
             <a:r>
-              <a:rPr lang="ca-ES" sz="700" noProof="0" dirty="0">
+              <a:rPr lang="ca-ES" sz="1200" noProof="0" dirty="0">
                 <a:solidFill>
                   <a:srgbClr val="6B7280"/>
                 </a:solidFill>
               </a:rPr>
               <a:t>12</a:t>
             </a:r>
-            <a:endParaRPr lang="ca-ES" sz="700" noProof="0" dirty="0"/>
+            <a:endParaRPr lang="ca-ES" sz="1200" noProof="0" dirty="0"/>
           </a:p>
         </p:txBody>
       </p:sp>
@@ -3586,415 +3530,6 @@
 </file>
 
 <file path=ppt/slides/slide13.xml><?xml version="1.0" encoding="utf-8"?>
-<p:sld xmlns:a="http://schemas.openxmlformats.org/drawingml/2006/main" xmlns:r="http://schemas.openxmlformats.org/officeDocument/2006/relationships" xmlns:p="http://schemas.openxmlformats.org/presentationml/2006/main">
-  <p:cSld name="Slide 11">
-    <p:bg>
-      <p:bgPr>
-        <a:solidFill>
-          <a:srgbClr val="FFFFFF"/>
-        </a:solidFill>
-        <a:effectLst/>
-      </p:bgPr>
-    </p:bg>
-    <p:spTree>
-      <p:nvGrpSpPr>
-        <p:cNvPr id="1" name=""/>
-        <p:cNvGrpSpPr/>
-        <p:nvPr/>
-      </p:nvGrpSpPr>
-      <p:grpSpPr>
-        <a:xfrm>
-          <a:off x="0" y="0"/>
-          <a:ext cx="0" cy="0"/>
-          <a:chOff x="0" y="0"/>
-          <a:chExt cx="0" cy="0"/>
-        </a:xfrm>
-      </p:grpSpPr>
-      <p:sp>
-        <p:nvSpPr>
-          <p:cNvPr id="2" name="Text 0"/>
-          <p:cNvSpPr/>
-          <p:nvPr/>
-        </p:nvSpPr>
-        <p:spPr>
-          <a:xfrm>
-            <a:off x="502920" y="554736"/>
-            <a:ext cx="10789920" cy="411480"/>
-          </a:xfrm>
-          <a:prstGeom prst="rect">
-            <a:avLst/>
-          </a:prstGeom>
-          <a:noFill/>
-          <a:ln/>
-        </p:spPr>
-        <p:txBody>
-          <a:bodyPr wrap="square" lIns="0" tIns="0" rIns="0" bIns="0" rtlCol="0" anchor="ctr"/>
-          <a:lstStyle/>
-          <a:p>
-            <a:pPr marL="0" indent="0">
-              <a:buNone/>
-            </a:pPr>
-            <a:r>
-              <a:rPr lang="ca-ES" sz="2400" b="1" dirty="0">
-                <a:solidFill>
-                  <a:srgbClr val="1B2A41"/>
-                </a:solidFill>
-                <a:latin typeface="Arial" pitchFamily="34" charset="0"/>
-                <a:ea typeface="Arial" pitchFamily="34" charset="-122"/>
-                <a:cs typeface="Arial" pitchFamily="34" charset="-120"/>
-              </a:rPr>
-              <a:t>C</a:t>
-            </a:r>
-            <a:r>
-              <a:rPr lang="ca-ES" sz="2400" b="1" noProof="0" dirty="0" err="1">
-                <a:solidFill>
-                  <a:srgbClr val="1B2A41"/>
-                </a:solidFill>
-                <a:latin typeface="Arial" pitchFamily="34" charset="0"/>
-                <a:ea typeface="Arial" pitchFamily="34" charset="-122"/>
-                <a:cs typeface="Arial" pitchFamily="34" charset="-120"/>
-              </a:rPr>
-              <a:t>omparativa</a:t>
-            </a:r>
-            <a:r>
-              <a:rPr lang="ca-ES" sz="2400" b="1" noProof="0" dirty="0">
-                <a:solidFill>
-                  <a:srgbClr val="1B2A41"/>
-                </a:solidFill>
-                <a:latin typeface="Arial" pitchFamily="34" charset="0"/>
-                <a:ea typeface="Arial" pitchFamily="34" charset="-122"/>
-                <a:cs typeface="Arial" pitchFamily="34" charset="-120"/>
-              </a:rPr>
-              <a:t> visual CNN </a:t>
-            </a:r>
-            <a:r>
-              <a:rPr lang="ca-ES" sz="2400" b="1" noProof="0" dirty="0" err="1">
-                <a:solidFill>
-                  <a:srgbClr val="1B2A41"/>
-                </a:solidFill>
-                <a:latin typeface="Arial" pitchFamily="34" charset="0"/>
-                <a:ea typeface="Arial" pitchFamily="34" charset="-122"/>
-                <a:cs typeface="Arial" pitchFamily="34" charset="-120"/>
-              </a:rPr>
-              <a:t>vs</a:t>
-            </a:r>
-            <a:r>
-              <a:rPr lang="ca-ES" sz="2400" b="1" noProof="0" dirty="0">
-                <a:solidFill>
-                  <a:srgbClr val="1B2A41"/>
-                </a:solidFill>
-                <a:latin typeface="Arial" pitchFamily="34" charset="0"/>
-                <a:ea typeface="Arial" pitchFamily="34" charset="-122"/>
-                <a:cs typeface="Arial" pitchFamily="34" charset="-120"/>
-              </a:rPr>
-              <a:t> SNN</a:t>
-            </a:r>
-            <a:endParaRPr lang="ca-ES" sz="2400" noProof="0" dirty="0"/>
-          </a:p>
-        </p:txBody>
-      </p:sp>
-      <p:sp>
-        <p:nvSpPr>
-          <p:cNvPr id="4" name="Shape 2"/>
-          <p:cNvSpPr/>
-          <p:nvPr/>
-        </p:nvSpPr>
-        <p:spPr>
-          <a:xfrm>
-            <a:off x="502920" y="1051560"/>
-            <a:ext cx="11155680" cy="0"/>
-          </a:xfrm>
-          <a:prstGeom prst="line">
-            <a:avLst/>
-          </a:prstGeom>
-          <a:noFill/>
-          <a:ln w="12700">
-            <a:solidFill>
-              <a:srgbClr val="2F80ED"/>
-            </a:solidFill>
-            <a:prstDash val="solid"/>
-          </a:ln>
-        </p:spPr>
-        <p:txBody>
-          <a:bodyPr/>
-          <a:lstStyle/>
-          <a:p>
-            <a:endParaRPr lang="ca-ES" noProof="0" dirty="0"/>
-          </a:p>
-        </p:txBody>
-      </p:sp>
-      <p:sp>
-        <p:nvSpPr>
-          <p:cNvPr id="5" name="Shape 3"/>
-          <p:cNvSpPr/>
-          <p:nvPr/>
-        </p:nvSpPr>
-        <p:spPr>
-          <a:xfrm>
-            <a:off x="868680" y="1853184"/>
-            <a:ext cx="6309360" cy="3886200"/>
-          </a:xfrm>
-          <a:prstGeom prst="rect">
-            <a:avLst/>
-          </a:prstGeom>
-          <a:solidFill>
-            <a:srgbClr val="FFFFFF">
-              <a:alpha val="0"/>
-            </a:srgbClr>
-          </a:solidFill>
-          <a:ln w="12700">
-            <a:solidFill>
-              <a:srgbClr val="D7DEE8"/>
-            </a:solidFill>
-            <a:prstDash val="solid"/>
-          </a:ln>
-        </p:spPr>
-        <p:txBody>
-          <a:bodyPr/>
-          <a:lstStyle/>
-          <a:p>
-            <a:endParaRPr lang="ca-ES" noProof="0" dirty="0"/>
-          </a:p>
-        </p:txBody>
-      </p:sp>
-      <p:pic>
-        <p:nvPicPr>
-          <p:cNvPr id="6" name="Image 0" descr="/mnt/data/tfg_assets/extracted/p53_img1.png"/>
-          <p:cNvPicPr>
-            <a:picLocks noChangeAspect="1"/>
-          </p:cNvPicPr>
-          <p:nvPr/>
-        </p:nvPicPr>
-        <p:blipFill>
-          <a:blip r:embed="rId3"/>
-          <a:stretch>
-            <a:fillRect/>
-          </a:stretch>
-        </p:blipFill>
-        <p:spPr>
-          <a:xfrm>
-            <a:off x="1316539" y="1889760"/>
-            <a:ext cx="5413641" cy="3813048"/>
-          </a:xfrm>
-          <a:prstGeom prst="rect">
-            <a:avLst/>
-          </a:prstGeom>
-        </p:spPr>
-      </p:pic>
-      <p:sp>
-        <p:nvSpPr>
-          <p:cNvPr id="7" name="Text 4"/>
-          <p:cNvSpPr/>
-          <p:nvPr/>
-        </p:nvSpPr>
-        <p:spPr>
-          <a:xfrm>
-            <a:off x="868680" y="5766816"/>
-            <a:ext cx="6309360" cy="146304"/>
-          </a:xfrm>
-          <a:prstGeom prst="rect">
-            <a:avLst/>
-          </a:prstGeom>
-          <a:noFill/>
-          <a:ln/>
-        </p:spPr>
-        <p:txBody>
-          <a:bodyPr wrap="square" lIns="0" tIns="0" rIns="0" bIns="0" rtlCol="0" anchor="ctr"/>
-          <a:lstStyle/>
-          <a:p>
-            <a:pPr marL="0" indent="0" algn="ctr">
-              <a:buNone/>
-            </a:pPr>
-            <a:r>
-              <a:rPr lang="ca-ES" sz="750" noProof="0" dirty="0">
-                <a:solidFill>
-                  <a:srgbClr val="6B7280"/>
-                </a:solidFill>
-              </a:rPr>
-              <a:t>Captura de l’aplicació web</a:t>
-            </a:r>
-            <a:endParaRPr lang="ca-ES" sz="750" noProof="0" dirty="0"/>
-          </a:p>
-        </p:txBody>
-      </p:sp>
-      <p:sp>
-        <p:nvSpPr>
-          <p:cNvPr id="8" name="Text 5"/>
-          <p:cNvSpPr/>
-          <p:nvPr/>
-        </p:nvSpPr>
-        <p:spPr>
-          <a:xfrm>
-            <a:off x="7589520" y="2587752"/>
-            <a:ext cx="3337560" cy="2011680"/>
-          </a:xfrm>
-          <a:prstGeom prst="rect">
-            <a:avLst/>
-          </a:prstGeom>
-          <a:noFill/>
-          <a:ln/>
-        </p:spPr>
-        <p:txBody>
-          <a:bodyPr wrap="square" lIns="1016" tIns="1016" rIns="1016" bIns="1016" rtlCol="0" anchor="ctr">
-            <a:normAutofit/>
-          </a:bodyPr>
-          <a:lstStyle/>
-          <a:p>
-            <a:pPr marL="152400" indent="-152400">
-              <a:buSzPct val="100000"/>
-              <a:buChar char="•"/>
-            </a:pPr>
-            <a:r>
-              <a:rPr lang="ca-ES" sz="1400" noProof="0" dirty="0" err="1">
-                <a:solidFill>
-                  <a:srgbClr val="111827"/>
-                </a:solidFill>
-              </a:rPr>
-              <a:t>Frontend</a:t>
-            </a:r>
-            <a:r>
-              <a:rPr lang="ca-ES" sz="1400" noProof="0" dirty="0">
-                <a:solidFill>
-                  <a:srgbClr val="111827"/>
-                </a:solidFill>
-              </a:rPr>
-              <a:t>: HTML/CSS amb </a:t>
-            </a:r>
-            <a:r>
-              <a:rPr lang="ca-ES" sz="1400" noProof="0" dirty="0" err="1">
-                <a:solidFill>
-                  <a:srgbClr val="111827"/>
-                </a:solidFill>
-              </a:rPr>
-              <a:t>canvas</a:t>
-            </a:r>
-            <a:r>
-              <a:rPr lang="ca-ES" sz="1400" noProof="0" dirty="0">
-                <a:solidFill>
-                  <a:srgbClr val="111827"/>
-                </a:solidFill>
-              </a:rPr>
-              <a:t> de 28×28 píxels.</a:t>
-            </a:r>
-            <a:endParaRPr lang="ca-ES" sz="1400" noProof="0" dirty="0"/>
-          </a:p>
-          <a:p>
-            <a:pPr marL="152400" indent="-152400">
-              <a:buSzPct val="100000"/>
-              <a:buChar char="•"/>
-            </a:pPr>
-            <a:r>
-              <a:rPr lang="ca-ES" sz="1400" noProof="0" dirty="0" err="1">
-                <a:solidFill>
-                  <a:srgbClr val="111827"/>
-                </a:solidFill>
-              </a:rPr>
-              <a:t>Backend</a:t>
-            </a:r>
-            <a:r>
-              <a:rPr lang="ca-ES" sz="1400" noProof="0" dirty="0">
-                <a:solidFill>
-                  <a:srgbClr val="111827"/>
-                </a:solidFill>
-              </a:rPr>
-              <a:t>: </a:t>
-            </a:r>
-            <a:r>
-              <a:rPr lang="ca-ES" sz="1400" noProof="0" dirty="0" err="1">
-                <a:solidFill>
-                  <a:srgbClr val="111827"/>
-                </a:solidFill>
-              </a:rPr>
-              <a:t>Flask</a:t>
-            </a:r>
-            <a:r>
-              <a:rPr lang="ca-ES" sz="1400" noProof="0" dirty="0">
-                <a:solidFill>
-                  <a:srgbClr val="111827"/>
-                </a:solidFill>
-              </a:rPr>
-              <a:t> en </a:t>
-            </a:r>
-            <a:r>
-              <a:rPr lang="ca-ES" sz="1400" noProof="0" dirty="0" err="1">
-                <a:solidFill>
-                  <a:srgbClr val="111827"/>
-                </a:solidFill>
-              </a:rPr>
-              <a:t>Python</a:t>
-            </a:r>
-            <a:r>
-              <a:rPr lang="ca-ES" sz="1400" noProof="0" dirty="0">
-                <a:solidFill>
-                  <a:srgbClr val="111827"/>
-                </a:solidFill>
-              </a:rPr>
-              <a:t> per carregar models i retornar prediccions.</a:t>
-            </a:r>
-            <a:endParaRPr lang="ca-ES" sz="1400" noProof="0" dirty="0"/>
-          </a:p>
-          <a:p>
-            <a:pPr marL="152400" indent="-152400">
-              <a:buSzPct val="100000"/>
-              <a:buChar char="•"/>
-            </a:pPr>
-            <a:r>
-              <a:rPr lang="ca-ES" sz="1400" noProof="0" dirty="0">
-                <a:solidFill>
-                  <a:srgbClr val="111827"/>
-                </a:solidFill>
-              </a:rPr>
-              <a:t>Objectiu: comparar visualment la predicció i la confiança de CNN i SNN.</a:t>
-            </a:r>
-            <a:endParaRPr lang="ca-ES" sz="1400" noProof="0" dirty="0"/>
-          </a:p>
-        </p:txBody>
-      </p:sp>
-      <p:sp>
-        <p:nvSpPr>
-          <p:cNvPr id="11" name="Text 8"/>
-          <p:cNvSpPr/>
-          <p:nvPr/>
-        </p:nvSpPr>
-        <p:spPr>
-          <a:xfrm>
-            <a:off x="10698480" y="6492240"/>
-            <a:ext cx="1005840" cy="146304"/>
-          </a:xfrm>
-          <a:prstGeom prst="rect">
-            <a:avLst/>
-          </a:prstGeom>
-          <a:noFill/>
-          <a:ln/>
-        </p:spPr>
-        <p:txBody>
-          <a:bodyPr wrap="square" lIns="0" tIns="0" rIns="0" bIns="0" rtlCol="0" anchor="ctr"/>
-          <a:lstStyle/>
-          <a:p>
-            <a:pPr marL="0" indent="0" algn="r">
-              <a:buNone/>
-            </a:pPr>
-            <a:r>
-              <a:rPr lang="ca-ES" sz="700" noProof="0" dirty="0">
-                <a:solidFill>
-                  <a:srgbClr val="6B7280"/>
-                </a:solidFill>
-              </a:rPr>
-              <a:t>13</a:t>
-            </a:r>
-            <a:endParaRPr lang="ca-ES" sz="700" noProof="0" dirty="0"/>
-          </a:p>
-        </p:txBody>
-      </p:sp>
-    </p:spTree>
-  </p:cSld>
-  <p:clrMapOvr>
-    <a:masterClrMapping/>
-  </p:clrMapOvr>
-</p:sld>
-</file>
-
-<file path=ppt/slides/slide14.xml><?xml version="1.0" encoding="utf-8"?>
 <p:sld xmlns:a="http://schemas.openxmlformats.org/drawingml/2006/main" xmlns:r="http://schemas.openxmlformats.org/officeDocument/2006/relationships" xmlns:p="http://schemas.openxmlformats.org/presentationml/2006/main">
   <p:cSld name="Slide 12">
     <p:bg>
@@ -4753,14 +4288,14 @@
               <a:buNone/>
             </a:pPr>
             <a:r>
-              <a:rPr lang="ca-ES" sz="700" noProof="0" dirty="0">
+              <a:rPr lang="ca-ES" sz="1200" noProof="0" dirty="0">
                 <a:solidFill>
                   <a:srgbClr val="6B7280"/>
                 </a:solidFill>
               </a:rPr>
-              <a:t>14</a:t>
-            </a:r>
-            <a:endParaRPr lang="ca-ES" sz="700" noProof="0" dirty="0"/>
+              <a:t>13</a:t>
+            </a:r>
+            <a:endParaRPr lang="ca-ES" sz="1200" noProof="0" dirty="0"/>
           </a:p>
         </p:txBody>
       </p:sp>
@@ -4772,7 +4307,7 @@
 </p:sld>
 </file>
 
-<file path=ppt/slides/slide15.xml><?xml version="1.0" encoding="utf-8"?>
+<file path=ppt/slides/slide14.xml><?xml version="1.0" encoding="utf-8"?>
 <p:sld xmlns:a="http://schemas.openxmlformats.org/drawingml/2006/main" xmlns:r="http://schemas.openxmlformats.org/officeDocument/2006/relationships" xmlns:p="http://schemas.openxmlformats.org/presentationml/2006/main">
   <p:cSld name="Slide 13">
     <p:bg>
@@ -5043,14 +4578,14 @@
               <a:buNone/>
             </a:pPr>
             <a:r>
-              <a:rPr lang="ca-ES" sz="700" noProof="0" dirty="0">
+              <a:rPr lang="ca-ES" sz="1200" noProof="0" dirty="0">
                 <a:solidFill>
                   <a:srgbClr val="6B7280"/>
                 </a:solidFill>
               </a:rPr>
-              <a:t>15</a:t>
-            </a:r>
-            <a:endParaRPr lang="ca-ES" sz="700" noProof="0" dirty="0"/>
+              <a:t>14</a:t>
+            </a:r>
+            <a:endParaRPr lang="ca-ES" sz="1200" noProof="0" dirty="0"/>
           </a:p>
         </p:txBody>
       </p:sp>
@@ -5620,7 +5155,7 @@
 </p:sld>
 </file>
 
-<file path=ppt/slides/slide16.xml><?xml version="1.0" encoding="utf-8"?>
+<file path=ppt/slides/slide15.xml><?xml version="1.0" encoding="utf-8"?>
 <p:sld xmlns:a="http://schemas.openxmlformats.org/drawingml/2006/main" xmlns:r="http://schemas.openxmlformats.org/officeDocument/2006/relationships" xmlns:p="http://schemas.openxmlformats.org/presentationml/2006/main">
   <p:cSld name="Slide 14">
     <p:bg>
@@ -6024,14 +5559,433 @@
               <a:buNone/>
             </a:pPr>
             <a:r>
+              <a:rPr lang="ca-ES" sz="1200" noProof="0" dirty="0">
+                <a:solidFill>
+                  <a:srgbClr val="6B7280"/>
+                </a:solidFill>
+              </a:rPr>
+              <a:t>15</a:t>
+            </a:r>
+            <a:r>
               <a:rPr lang="ca-ES" sz="700" noProof="0" dirty="0">
                 <a:solidFill>
                   <a:srgbClr val="6B7280"/>
                 </a:solidFill>
               </a:rPr>
-              <a:t>16 </a:t>
+              <a:t> </a:t>
             </a:r>
             <a:endParaRPr lang="ca-ES" sz="700" noProof="0" dirty="0"/>
+          </a:p>
+        </p:txBody>
+      </p:sp>
+    </p:spTree>
+  </p:cSld>
+  <p:clrMapOvr>
+    <a:masterClrMapping/>
+  </p:clrMapOvr>
+</p:sld>
+</file>
+
+<file path=ppt/slides/slide16.xml><?xml version="1.0" encoding="utf-8"?>
+<p:sld xmlns:a="http://schemas.openxmlformats.org/drawingml/2006/main" xmlns:r="http://schemas.openxmlformats.org/officeDocument/2006/relationships" xmlns:p="http://schemas.openxmlformats.org/presentationml/2006/main">
+  <p:cSld name="Slide 11">
+    <p:bg>
+      <p:bgPr>
+        <a:solidFill>
+          <a:srgbClr val="FFFFFF"/>
+        </a:solidFill>
+        <a:effectLst/>
+      </p:bgPr>
+    </p:bg>
+    <p:spTree>
+      <p:nvGrpSpPr>
+        <p:cNvPr id="1" name=""/>
+        <p:cNvGrpSpPr/>
+        <p:nvPr/>
+      </p:nvGrpSpPr>
+      <p:grpSpPr>
+        <a:xfrm>
+          <a:off x="0" y="0"/>
+          <a:ext cx="0" cy="0"/>
+          <a:chOff x="0" y="0"/>
+          <a:chExt cx="0" cy="0"/>
+        </a:xfrm>
+      </p:grpSpPr>
+      <p:sp>
+        <p:nvSpPr>
+          <p:cNvPr id="2" name="Text 0"/>
+          <p:cNvSpPr/>
+          <p:nvPr/>
+        </p:nvSpPr>
+        <p:spPr>
+          <a:xfrm>
+            <a:off x="502920" y="554736"/>
+            <a:ext cx="10789920" cy="411480"/>
+          </a:xfrm>
+          <a:prstGeom prst="rect">
+            <a:avLst/>
+          </a:prstGeom>
+          <a:noFill/>
+          <a:ln/>
+        </p:spPr>
+        <p:txBody>
+          <a:bodyPr wrap="square" lIns="0" tIns="0" rIns="0" bIns="0" rtlCol="0" anchor="ctr"/>
+          <a:lstStyle/>
+          <a:p>
+            <a:pPr marL="0" indent="0">
+              <a:buNone/>
+            </a:pPr>
+            <a:r>
+              <a:rPr lang="ca-ES" sz="2400" b="1" dirty="0">
+                <a:solidFill>
+                  <a:srgbClr val="1B2A41"/>
+                </a:solidFill>
+                <a:latin typeface="Arial" pitchFamily="34" charset="0"/>
+                <a:ea typeface="Arial" pitchFamily="34" charset="-122"/>
+                <a:cs typeface="Arial" pitchFamily="34" charset="-120"/>
+              </a:rPr>
+              <a:t>C</a:t>
+            </a:r>
+            <a:r>
+              <a:rPr lang="ca-ES" sz="2400" b="1" noProof="0" dirty="0" err="1">
+                <a:solidFill>
+                  <a:srgbClr val="1B2A41"/>
+                </a:solidFill>
+                <a:latin typeface="Arial" pitchFamily="34" charset="0"/>
+                <a:ea typeface="Arial" pitchFamily="34" charset="-122"/>
+                <a:cs typeface="Arial" pitchFamily="34" charset="-120"/>
+              </a:rPr>
+              <a:t>omparativa</a:t>
+            </a:r>
+            <a:r>
+              <a:rPr lang="ca-ES" sz="2400" b="1" noProof="0" dirty="0">
+                <a:solidFill>
+                  <a:srgbClr val="1B2A41"/>
+                </a:solidFill>
+                <a:latin typeface="Arial" pitchFamily="34" charset="0"/>
+                <a:ea typeface="Arial" pitchFamily="34" charset="-122"/>
+                <a:cs typeface="Arial" pitchFamily="34" charset="-120"/>
+              </a:rPr>
+              <a:t> visual CNN </a:t>
+            </a:r>
+            <a:r>
+              <a:rPr lang="ca-ES" sz="2400" b="1" noProof="0" dirty="0" err="1">
+                <a:solidFill>
+                  <a:srgbClr val="1B2A41"/>
+                </a:solidFill>
+                <a:latin typeface="Arial" pitchFamily="34" charset="0"/>
+                <a:ea typeface="Arial" pitchFamily="34" charset="-122"/>
+                <a:cs typeface="Arial" pitchFamily="34" charset="-120"/>
+              </a:rPr>
+              <a:t>vs</a:t>
+            </a:r>
+            <a:r>
+              <a:rPr lang="ca-ES" sz="2400" b="1" noProof="0" dirty="0">
+                <a:solidFill>
+                  <a:srgbClr val="1B2A41"/>
+                </a:solidFill>
+                <a:latin typeface="Arial" pitchFamily="34" charset="0"/>
+                <a:ea typeface="Arial" pitchFamily="34" charset="-122"/>
+                <a:cs typeface="Arial" pitchFamily="34" charset="-120"/>
+              </a:rPr>
+              <a:t> SNN</a:t>
+            </a:r>
+            <a:endParaRPr lang="ca-ES" sz="2400" noProof="0" dirty="0"/>
+          </a:p>
+        </p:txBody>
+      </p:sp>
+      <p:sp>
+        <p:nvSpPr>
+          <p:cNvPr id="4" name="Shape 2"/>
+          <p:cNvSpPr/>
+          <p:nvPr/>
+        </p:nvSpPr>
+        <p:spPr>
+          <a:xfrm>
+            <a:off x="502920" y="1051560"/>
+            <a:ext cx="11155680" cy="0"/>
+          </a:xfrm>
+          <a:prstGeom prst="line">
+            <a:avLst/>
+          </a:prstGeom>
+          <a:noFill/>
+          <a:ln w="12700">
+            <a:solidFill>
+              <a:srgbClr val="2F80ED"/>
+            </a:solidFill>
+            <a:prstDash val="solid"/>
+          </a:ln>
+        </p:spPr>
+        <p:txBody>
+          <a:bodyPr/>
+          <a:lstStyle/>
+          <a:p>
+            <a:endParaRPr lang="ca-ES" noProof="0" dirty="0"/>
+          </a:p>
+        </p:txBody>
+      </p:sp>
+      <p:sp>
+        <p:nvSpPr>
+          <p:cNvPr id="5" name="Shape 3"/>
+          <p:cNvSpPr/>
+          <p:nvPr/>
+        </p:nvSpPr>
+        <p:spPr>
+          <a:xfrm>
+            <a:off x="868680" y="1853184"/>
+            <a:ext cx="6309360" cy="3886200"/>
+          </a:xfrm>
+          <a:prstGeom prst="rect">
+            <a:avLst/>
+          </a:prstGeom>
+          <a:solidFill>
+            <a:srgbClr val="FFFFFF">
+              <a:alpha val="0"/>
+            </a:srgbClr>
+          </a:solidFill>
+          <a:ln w="12700">
+            <a:solidFill>
+              <a:srgbClr val="D7DEE8"/>
+            </a:solidFill>
+            <a:prstDash val="solid"/>
+          </a:ln>
+        </p:spPr>
+        <p:txBody>
+          <a:bodyPr/>
+          <a:lstStyle/>
+          <a:p>
+            <a:endParaRPr lang="ca-ES" noProof="0" dirty="0"/>
+          </a:p>
+        </p:txBody>
+      </p:sp>
+      <p:pic>
+        <p:nvPicPr>
+          <p:cNvPr id="6" name="Image 0" descr="/mnt/data/tfg_assets/extracted/p53_img1.png">
+            <a:hlinkClick r:id="rId3"/>
+          </p:cNvPr>
+          <p:cNvPicPr>
+            <a:picLocks noChangeAspect="1"/>
+          </p:cNvPicPr>
+          <p:nvPr/>
+        </p:nvPicPr>
+        <p:blipFill>
+          <a:blip r:embed="rId4"/>
+          <a:stretch>
+            <a:fillRect/>
+          </a:stretch>
+        </p:blipFill>
+        <p:spPr>
+          <a:xfrm>
+            <a:off x="1316539" y="1889760"/>
+            <a:ext cx="5413641" cy="3813048"/>
+          </a:xfrm>
+          <a:prstGeom prst="rect">
+            <a:avLst/>
+          </a:prstGeom>
+        </p:spPr>
+      </p:pic>
+      <p:sp>
+        <p:nvSpPr>
+          <p:cNvPr id="7" name="Text 4"/>
+          <p:cNvSpPr/>
+          <p:nvPr/>
+        </p:nvSpPr>
+        <p:spPr>
+          <a:xfrm>
+            <a:off x="868680" y="5766816"/>
+            <a:ext cx="6309360" cy="146304"/>
+          </a:xfrm>
+          <a:prstGeom prst="rect">
+            <a:avLst/>
+          </a:prstGeom>
+          <a:noFill/>
+          <a:ln/>
+        </p:spPr>
+        <p:txBody>
+          <a:bodyPr wrap="square" lIns="0" tIns="0" rIns="0" bIns="0" rtlCol="0" anchor="ctr"/>
+          <a:lstStyle/>
+          <a:p>
+            <a:pPr marL="0" indent="0" algn="ctr">
+              <a:buNone/>
+            </a:pPr>
+            <a:r>
+              <a:rPr lang="ca-ES" sz="750" noProof="0" dirty="0">
+                <a:solidFill>
+                  <a:srgbClr val="6B7280"/>
+                </a:solidFill>
+              </a:rPr>
+              <a:t>Captura de l’aplicació web</a:t>
+            </a:r>
+            <a:endParaRPr lang="ca-ES" sz="750" noProof="0" dirty="0"/>
+          </a:p>
+        </p:txBody>
+      </p:sp>
+      <p:sp>
+        <p:nvSpPr>
+          <p:cNvPr id="8" name="Text 5"/>
+          <p:cNvSpPr/>
+          <p:nvPr/>
+        </p:nvSpPr>
+        <p:spPr>
+          <a:xfrm>
+            <a:off x="7589520" y="2587752"/>
+            <a:ext cx="3337560" cy="2011680"/>
+          </a:xfrm>
+          <a:prstGeom prst="rect">
+            <a:avLst/>
+          </a:prstGeom>
+          <a:noFill/>
+          <a:ln/>
+        </p:spPr>
+        <p:txBody>
+          <a:bodyPr wrap="square" lIns="1016" tIns="1016" rIns="1016" bIns="1016" rtlCol="0" anchor="ctr">
+            <a:normAutofit/>
+          </a:bodyPr>
+          <a:lstStyle/>
+          <a:p>
+            <a:pPr marL="152400" indent="-152400">
+              <a:buSzPct val="100000"/>
+              <a:buChar char="•"/>
+            </a:pPr>
+            <a:r>
+              <a:rPr lang="ca-ES" sz="1400" noProof="0" dirty="0" err="1">
+                <a:solidFill>
+                  <a:srgbClr val="111827"/>
+                </a:solidFill>
+              </a:rPr>
+              <a:t>Frontend</a:t>
+            </a:r>
+            <a:r>
+              <a:rPr lang="ca-ES" sz="1400" noProof="0" dirty="0">
+                <a:solidFill>
+                  <a:srgbClr val="111827"/>
+                </a:solidFill>
+              </a:rPr>
+              <a:t>: HTML/CSS amb </a:t>
+            </a:r>
+            <a:r>
+              <a:rPr lang="ca-ES" sz="1400" noProof="0" dirty="0" err="1">
+                <a:solidFill>
+                  <a:srgbClr val="111827"/>
+                </a:solidFill>
+              </a:rPr>
+              <a:t>canvas</a:t>
+            </a:r>
+            <a:r>
+              <a:rPr lang="ca-ES" sz="1400" noProof="0" dirty="0">
+                <a:solidFill>
+                  <a:srgbClr val="111827"/>
+                </a:solidFill>
+              </a:rPr>
+              <a:t> de 28×28 píxels.</a:t>
+            </a:r>
+            <a:endParaRPr lang="ca-ES" sz="1400" noProof="0" dirty="0"/>
+          </a:p>
+          <a:p>
+            <a:pPr marL="152400" indent="-152400">
+              <a:buSzPct val="100000"/>
+              <a:buChar char="•"/>
+            </a:pPr>
+            <a:r>
+              <a:rPr lang="ca-ES" sz="1400" noProof="0" dirty="0" err="1">
+                <a:solidFill>
+                  <a:srgbClr val="111827"/>
+                </a:solidFill>
+              </a:rPr>
+              <a:t>Backend</a:t>
+            </a:r>
+            <a:r>
+              <a:rPr lang="ca-ES" sz="1400" noProof="0" dirty="0">
+                <a:solidFill>
+                  <a:srgbClr val="111827"/>
+                </a:solidFill>
+              </a:rPr>
+              <a:t>: </a:t>
+            </a:r>
+            <a:r>
+              <a:rPr lang="ca-ES" sz="1400" noProof="0" dirty="0" err="1">
+                <a:solidFill>
+                  <a:srgbClr val="111827"/>
+                </a:solidFill>
+              </a:rPr>
+              <a:t>Flask</a:t>
+            </a:r>
+            <a:r>
+              <a:rPr lang="ca-ES" sz="1400" noProof="0" dirty="0">
+                <a:solidFill>
+                  <a:srgbClr val="111827"/>
+                </a:solidFill>
+              </a:rPr>
+              <a:t> en </a:t>
+            </a:r>
+            <a:r>
+              <a:rPr lang="ca-ES" sz="1400" noProof="0" dirty="0" err="1">
+                <a:solidFill>
+                  <a:srgbClr val="111827"/>
+                </a:solidFill>
+              </a:rPr>
+              <a:t>Python</a:t>
+            </a:r>
+            <a:r>
+              <a:rPr lang="ca-ES" sz="1400" noProof="0" dirty="0">
+                <a:solidFill>
+                  <a:srgbClr val="111827"/>
+                </a:solidFill>
+              </a:rPr>
+              <a:t> per carregar models i retornar prediccions.</a:t>
+            </a:r>
+            <a:endParaRPr lang="ca-ES" sz="1400" noProof="0" dirty="0"/>
+          </a:p>
+          <a:p>
+            <a:pPr marL="152400" indent="-152400">
+              <a:buSzPct val="100000"/>
+              <a:buChar char="•"/>
+            </a:pPr>
+            <a:r>
+              <a:rPr lang="ca-ES" sz="1400" noProof="0" dirty="0">
+                <a:solidFill>
+                  <a:srgbClr val="111827"/>
+                </a:solidFill>
+              </a:rPr>
+              <a:t>Objectiu: comparar visualment la predicció i la confiança de CNN i SNN.</a:t>
+            </a:r>
+            <a:endParaRPr lang="ca-ES" sz="1400" noProof="0" dirty="0"/>
+          </a:p>
+        </p:txBody>
+      </p:sp>
+      <p:sp>
+        <p:nvSpPr>
+          <p:cNvPr id="11" name="Text 8"/>
+          <p:cNvSpPr/>
+          <p:nvPr/>
+        </p:nvSpPr>
+        <p:spPr>
+          <a:xfrm>
+            <a:off x="10698480" y="6492240"/>
+            <a:ext cx="1005840" cy="146304"/>
+          </a:xfrm>
+          <a:prstGeom prst="rect">
+            <a:avLst/>
+          </a:prstGeom>
+          <a:noFill/>
+          <a:ln/>
+        </p:spPr>
+        <p:txBody>
+          <a:bodyPr wrap="square" lIns="0" tIns="0" rIns="0" bIns="0" rtlCol="0" anchor="ctr"/>
+          <a:lstStyle/>
+          <a:p>
+            <a:pPr marL="0" indent="0" algn="r">
+              <a:buNone/>
+            </a:pPr>
+            <a:r>
+              <a:rPr lang="ca-ES" sz="1200" noProof="0" dirty="0">
+                <a:solidFill>
+                  <a:srgbClr val="6B7280"/>
+                </a:solidFill>
+              </a:rPr>
+              <a:t>16</a:t>
+            </a:r>
+            <a:endParaRPr lang="ca-ES" sz="1200" noProof="0" dirty="0"/>
           </a:p>
         </p:txBody>
       </p:sp>
@@ -6237,57 +6191,6 @@
           </a:prstGeom>
         </p:spPr>
       </p:pic>
-      <p:sp>
-        <p:nvSpPr>
-          <p:cNvPr id="9" name="CuadroTexto 8">
-            <a:extLst>
-              <a:ext uri="{FF2B5EF4-FFF2-40B4-BE49-F238E27FC236}">
-                <a16:creationId xmlns:a16="http://schemas.microsoft.com/office/drawing/2014/main" id="{CA41057E-DECA-634F-2E26-352177E55209}"/>
-              </a:ext>
-            </a:extLst>
-          </p:cNvPr>
-          <p:cNvSpPr txBox="1"/>
-          <p:nvPr/>
-        </p:nvSpPr>
-        <p:spPr>
-          <a:xfrm>
-            <a:off x="822960" y="4021574"/>
-            <a:ext cx="3639312" cy="369332"/>
-          </a:xfrm>
-          <a:prstGeom prst="rect">
-            <a:avLst/>
-          </a:prstGeom>
-          <a:noFill/>
-        </p:spPr>
-        <p:txBody>
-          <a:bodyPr wrap="square" rtlCol="0">
-            <a:spAutoFit/>
-          </a:bodyPr>
-          <a:lstStyle/>
-          <a:p>
-            <a:r>
-              <a:rPr lang="en-GB" dirty="0">
-                <a:solidFill>
-                  <a:schemeClr val="accent6">
-                    <a:lumMod val="60000"/>
-                    <a:lumOff val="40000"/>
-                  </a:schemeClr>
-                </a:solidFill>
-                <a:hlinkClick r:id="rId4"/>
-              </a:rPr>
-              <a:t>DEMO CNN vs SNN</a:t>
-            </a:r>
-            <a:endParaRPr lang="en-GB" dirty="0">
-              <a:solidFill>
-                <a:schemeClr val="accent6">
-                  <a:lumMod val="60000"/>
-                  <a:lumOff val="40000"/>
-                </a:schemeClr>
-              </a:solidFill>
-            </a:endParaRPr>
-          </a:p>
-        </p:txBody>
-      </p:sp>
     </p:spTree>
   </p:cSld>
   <p:clrMapOvr>
@@ -6754,12 +6657,20 @@
               <a:buNone/>
             </a:pPr>
             <a:r>
+              <a:rPr lang="ca-ES" sz="1200" noProof="0" dirty="0">
+                <a:solidFill>
+                  <a:srgbClr val="6B7280"/>
+                </a:solidFill>
+              </a:rPr>
+              <a:t>02</a:t>
+            </a:r>
+            <a:r>
               <a:rPr lang="ca-ES" sz="700" noProof="0" dirty="0">
                 <a:solidFill>
                   <a:srgbClr val="6B7280"/>
                 </a:solidFill>
               </a:rPr>
-              <a:t>02 </a:t>
+              <a:t> </a:t>
             </a:r>
             <a:endParaRPr lang="ca-ES" sz="700" noProof="0" dirty="0"/>
           </a:p>
@@ -6955,7 +6866,19 @@
                   <a:srgbClr val="6B7280"/>
                 </a:solidFill>
               </a:rPr>
-              <a:t>Consum energètic associat a models d’IA</a:t>
+              <a:t>Consum energètic associat a models d’IA. </a:t>
+            </a:r>
+            <a:r>
+              <a:rPr lang="fr-FR" sz="800" dirty="0"/>
+              <a:t>Font: S. Chen, </a:t>
+            </a:r>
+            <a:r>
+              <a:rPr lang="fr-FR" sz="800" i="1" dirty="0"/>
+              <a:t>Nature</a:t>
+            </a:r>
+            <a:r>
+              <a:rPr lang="fr-FR" sz="800" dirty="0"/>
+              <a:t>, 2025.</a:t>
             </a:r>
             <a:endParaRPr lang="ca-ES" sz="750" noProof="0" dirty="0"/>
           </a:p>
@@ -6986,12 +6909,20 @@
               <a:buNone/>
             </a:pPr>
             <a:r>
+              <a:rPr lang="ca-ES" sz="1200" noProof="0" dirty="0">
+                <a:solidFill>
+                  <a:srgbClr val="6B7280"/>
+                </a:solidFill>
+              </a:rPr>
+              <a:t>03</a:t>
+            </a:r>
+            <a:r>
               <a:rPr lang="ca-ES" sz="700" noProof="0" dirty="0">
                 <a:solidFill>
                   <a:srgbClr val="6B7280"/>
                 </a:solidFill>
               </a:rPr>
-              <a:t>03 </a:t>
+              <a:t> </a:t>
             </a:r>
             <a:endParaRPr lang="ca-ES" sz="700" noProof="0" dirty="0"/>
           </a:p>
@@ -7294,7 +7225,7 @@
         </p:nvSpPr>
         <p:spPr>
           <a:xfrm>
-            <a:off x="731520" y="2715768"/>
+            <a:off x="731520" y="4872487"/>
             <a:ext cx="457200" cy="411480"/>
           </a:xfrm>
           <a:prstGeom prst="rect">
@@ -7311,14 +7242,14 @@
               <a:buNone/>
             </a:pPr>
             <a:r>
-              <a:rPr lang="ca-ES" sz="2200" b="1" noProof="0" dirty="0">
+              <a:rPr lang="ca-ES" b="1" noProof="0" dirty="0">
                 <a:solidFill>
                   <a:srgbClr val="2F80ED"/>
                 </a:solidFill>
               </a:rPr>
               <a:t>1</a:t>
             </a:r>
-            <a:endParaRPr lang="ca-ES" sz="2200" noProof="0" dirty="0"/>
+            <a:endParaRPr lang="ca-ES" noProof="0" dirty="0"/>
           </a:p>
         </p:txBody>
       </p:sp>
@@ -7330,7 +7261,7 @@
         </p:nvSpPr>
         <p:spPr>
           <a:xfrm>
-            <a:off x="1298448" y="2743200"/>
+            <a:off x="1298448" y="4925143"/>
             <a:ext cx="2560320" cy="320040"/>
           </a:xfrm>
           <a:prstGeom prst="rect">
@@ -7347,14 +7278,14 @@
               <a:buNone/>
             </a:pPr>
             <a:r>
-              <a:rPr lang="ca-ES" sz="1900" b="1" noProof="0" dirty="0">
+              <a:rPr lang="ca-ES" sz="1600" b="1" noProof="0" dirty="0">
                 <a:solidFill>
                   <a:srgbClr val="1B2A41"/>
                 </a:solidFill>
               </a:rPr>
               <a:t>Entendre</a:t>
             </a:r>
-            <a:endParaRPr lang="ca-ES" sz="1900" noProof="0" dirty="0"/>
+            <a:endParaRPr lang="ca-ES" sz="1600" noProof="0" dirty="0"/>
           </a:p>
         </p:txBody>
       </p:sp>
@@ -7366,7 +7297,7 @@
         </p:nvSpPr>
         <p:spPr>
           <a:xfrm>
-            <a:off x="731520" y="3355848"/>
+            <a:off x="731520" y="5146810"/>
             <a:ext cx="3017520" cy="1234440"/>
           </a:xfrm>
           <a:prstGeom prst="rect">
@@ -7385,7 +7316,7 @@
               <a:buNone/>
             </a:pPr>
             <a:r>
-              <a:rPr lang="ca-ES" sz="1500" noProof="0" dirty="0">
+              <a:rPr lang="ca-ES" sz="1200" noProof="0" dirty="0">
                 <a:solidFill>
                   <a:srgbClr val="111827"/>
                 </a:solidFill>
@@ -7393,7 +7324,7 @@
               <a:t>Situar les </a:t>
             </a:r>
             <a:r>
-              <a:rPr lang="ca-ES" sz="1500" noProof="0" dirty="0" err="1">
+              <a:rPr lang="ca-ES" sz="1200" noProof="0" dirty="0" err="1">
                 <a:solidFill>
                   <a:srgbClr val="111827"/>
                 </a:solidFill>
@@ -7401,14 +7332,14 @@
               <a:t>SNNs</a:t>
             </a:r>
             <a:r>
-              <a:rPr lang="ca-ES" sz="1500" noProof="0" dirty="0">
+              <a:rPr lang="ca-ES" sz="1200" noProof="0" dirty="0">
                 <a:solidFill>
                   <a:srgbClr val="111827"/>
                 </a:solidFill>
               </a:rPr>
               <a:t> dins l’evolució de la IA i estudiar-ne els fonaments tècnics.</a:t>
             </a:r>
-            <a:endParaRPr lang="ca-ES" sz="1500" noProof="0" dirty="0"/>
+            <a:endParaRPr lang="ca-ES" sz="1200" noProof="0" dirty="0"/>
           </a:p>
         </p:txBody>
       </p:sp>
@@ -7420,7 +7351,7 @@
         </p:nvSpPr>
         <p:spPr>
           <a:xfrm>
-            <a:off x="731520" y="4818888"/>
+            <a:off x="731520" y="6281928"/>
             <a:ext cx="3063240" cy="0"/>
           </a:xfrm>
           <a:prstGeom prst="line">
@@ -7438,7 +7369,7 @@
           <a:bodyPr/>
           <a:lstStyle/>
           <a:p>
-            <a:endParaRPr lang="ca-ES" noProof="0" dirty="0"/>
+            <a:endParaRPr lang="ca-ES" sz="1400" noProof="0" dirty="0"/>
           </a:p>
         </p:txBody>
       </p:sp>
@@ -7450,7 +7381,7 @@
         </p:nvSpPr>
         <p:spPr>
           <a:xfrm>
-            <a:off x="4526280" y="2715768"/>
+            <a:off x="4526280" y="4872487"/>
             <a:ext cx="457200" cy="411480"/>
           </a:xfrm>
           <a:prstGeom prst="rect">
@@ -7467,14 +7398,14 @@
               <a:buNone/>
             </a:pPr>
             <a:r>
-              <a:rPr lang="ca-ES" sz="2200" b="1" noProof="0" dirty="0">
+              <a:rPr lang="ca-ES" b="1" noProof="0" dirty="0">
                 <a:solidFill>
                   <a:srgbClr val="2F80ED"/>
                 </a:solidFill>
               </a:rPr>
               <a:t>2</a:t>
             </a:r>
-            <a:endParaRPr lang="ca-ES" sz="2200" noProof="0" dirty="0"/>
+            <a:endParaRPr lang="ca-ES" noProof="0" dirty="0"/>
           </a:p>
         </p:txBody>
       </p:sp>
@@ -7486,7 +7417,7 @@
         </p:nvSpPr>
         <p:spPr>
           <a:xfrm>
-            <a:off x="5093208" y="2743200"/>
+            <a:off x="5093208" y="4925143"/>
             <a:ext cx="2560320" cy="320040"/>
           </a:xfrm>
           <a:prstGeom prst="rect">
@@ -7503,14 +7434,14 @@
               <a:buNone/>
             </a:pPr>
             <a:r>
-              <a:rPr lang="ca-ES" sz="1900" b="1" noProof="0" dirty="0">
+              <a:rPr lang="ca-ES" sz="1600" b="1" noProof="0" dirty="0">
                 <a:solidFill>
                   <a:srgbClr val="1B2A41"/>
                 </a:solidFill>
               </a:rPr>
               <a:t>Implementar</a:t>
             </a:r>
-            <a:endParaRPr lang="ca-ES" sz="1900" noProof="0" dirty="0"/>
+            <a:endParaRPr lang="ca-ES" sz="1600" noProof="0" dirty="0"/>
           </a:p>
         </p:txBody>
       </p:sp>
@@ -7522,7 +7453,7 @@
         </p:nvSpPr>
         <p:spPr>
           <a:xfrm>
-            <a:off x="4526280" y="3355848"/>
+            <a:off x="4526280" y="5146810"/>
             <a:ext cx="3017520" cy="1234440"/>
           </a:xfrm>
           <a:prstGeom prst="rect">
@@ -7541,14 +7472,14 @@
               <a:buNone/>
             </a:pPr>
             <a:r>
-              <a:rPr lang="ca-ES" sz="1500" noProof="0" dirty="0">
+              <a:rPr lang="ca-ES" sz="1200" noProof="0" dirty="0">
                 <a:solidFill>
                   <a:srgbClr val="111827"/>
                 </a:solidFill>
               </a:rPr>
               <a:t>Entrenar models ANN/CNN i convertir-los a SNN mitjançant codificació per taxa.</a:t>
             </a:r>
-            <a:endParaRPr lang="ca-ES" sz="1500" noProof="0" dirty="0"/>
+            <a:endParaRPr lang="ca-ES" sz="1200" noProof="0" dirty="0"/>
           </a:p>
         </p:txBody>
       </p:sp>
@@ -7560,7 +7491,7 @@
         </p:nvSpPr>
         <p:spPr>
           <a:xfrm>
-            <a:off x="4526280" y="4818888"/>
+            <a:off x="4526280" y="6281928"/>
             <a:ext cx="3063240" cy="0"/>
           </a:xfrm>
           <a:prstGeom prst="line">
@@ -7578,7 +7509,7 @@
           <a:bodyPr/>
           <a:lstStyle/>
           <a:p>
-            <a:endParaRPr lang="ca-ES" noProof="0" dirty="0"/>
+            <a:endParaRPr lang="ca-ES" sz="1400" noProof="0" dirty="0"/>
           </a:p>
         </p:txBody>
       </p:sp>
@@ -7590,7 +7521,7 @@
         </p:nvSpPr>
         <p:spPr>
           <a:xfrm>
-            <a:off x="8321040" y="2715768"/>
+            <a:off x="8321040" y="4872487"/>
             <a:ext cx="457200" cy="411480"/>
           </a:xfrm>
           <a:prstGeom prst="rect">
@@ -7607,14 +7538,14 @@
               <a:buNone/>
             </a:pPr>
             <a:r>
-              <a:rPr lang="ca-ES" sz="2200" b="1" noProof="0" dirty="0">
+              <a:rPr lang="ca-ES" b="1" noProof="0" dirty="0">
                 <a:solidFill>
                   <a:srgbClr val="2F80ED"/>
                 </a:solidFill>
               </a:rPr>
               <a:t>3</a:t>
             </a:r>
-            <a:endParaRPr lang="ca-ES" sz="2200" noProof="0" dirty="0"/>
+            <a:endParaRPr lang="ca-ES" noProof="0" dirty="0"/>
           </a:p>
         </p:txBody>
       </p:sp>
@@ -7626,7 +7557,7 @@
         </p:nvSpPr>
         <p:spPr>
           <a:xfrm>
-            <a:off x="8887968" y="2743200"/>
+            <a:off x="8887968" y="4931449"/>
             <a:ext cx="2560320" cy="320040"/>
           </a:xfrm>
           <a:prstGeom prst="rect">
@@ -7643,14 +7574,14 @@
               <a:buNone/>
             </a:pPr>
             <a:r>
-              <a:rPr lang="ca-ES" sz="1900" b="1" noProof="0" dirty="0">
+              <a:rPr lang="ca-ES" sz="1600" b="1" noProof="0" dirty="0">
                 <a:solidFill>
                   <a:srgbClr val="1B2A41"/>
                 </a:solidFill>
               </a:rPr>
               <a:t>Avaluar</a:t>
             </a:r>
-            <a:endParaRPr lang="ca-ES" sz="1900" noProof="0" dirty="0"/>
+            <a:endParaRPr lang="ca-ES" sz="1600" noProof="0" dirty="0"/>
           </a:p>
         </p:txBody>
       </p:sp>
@@ -7662,7 +7593,7 @@
         </p:nvSpPr>
         <p:spPr>
           <a:xfrm>
-            <a:off x="8321040" y="3355848"/>
+            <a:off x="8321040" y="5146810"/>
             <a:ext cx="3017520" cy="1234440"/>
           </a:xfrm>
           <a:prstGeom prst="rect">
@@ -7681,14 +7612,14 @@
               <a:buNone/>
             </a:pPr>
             <a:r>
-              <a:rPr lang="ca-ES" sz="1500" noProof="0" dirty="0">
+              <a:rPr lang="ca-ES" sz="1200" noProof="0" dirty="0">
                 <a:solidFill>
                   <a:srgbClr val="111827"/>
                 </a:solidFill>
               </a:rPr>
               <a:t>Comparar resultats, visualitzar prediccions i valorar-ne potencial tecnològic.</a:t>
             </a:r>
-            <a:endParaRPr lang="ca-ES" sz="1500" noProof="0" dirty="0"/>
+            <a:endParaRPr lang="ca-ES" sz="1200" noProof="0" dirty="0"/>
           </a:p>
         </p:txBody>
       </p:sp>
@@ -7700,7 +7631,7 @@
         </p:nvSpPr>
         <p:spPr>
           <a:xfrm>
-            <a:off x="8321040" y="4818888"/>
+            <a:off x="8321040" y="6281928"/>
             <a:ext cx="3063240" cy="0"/>
           </a:xfrm>
           <a:prstGeom prst="line">
@@ -7718,7 +7649,7 @@
           <a:bodyPr/>
           <a:lstStyle/>
           <a:p>
-            <a:endParaRPr lang="ca-ES" noProof="0" dirty="0"/>
+            <a:endParaRPr lang="ca-ES" sz="1400" noProof="0" dirty="0"/>
           </a:p>
         </p:txBody>
       </p:sp>
@@ -7747,14 +7678,327 @@
               <a:buNone/>
             </a:pPr>
             <a:r>
-              <a:rPr lang="ca-ES" sz="700" noProof="0" dirty="0">
+              <a:rPr lang="ca-ES" sz="1200" noProof="0" dirty="0">
                 <a:solidFill>
                   <a:srgbClr val="6B7280"/>
                 </a:solidFill>
               </a:rPr>
               <a:t>04</a:t>
             </a:r>
-            <a:endParaRPr lang="ca-ES" sz="700" noProof="0" dirty="0"/>
+            <a:endParaRPr lang="ca-ES" sz="1200" noProof="0" dirty="0"/>
+          </a:p>
+        </p:txBody>
+      </p:sp>
+      <p:sp>
+        <p:nvSpPr>
+          <p:cNvPr id="3" name="QuadreDeText 2">
+            <a:extLst>
+              <a:ext uri="{FF2B5EF4-FFF2-40B4-BE49-F238E27FC236}">
+                <a16:creationId xmlns:a16="http://schemas.microsoft.com/office/drawing/2014/main" id="{C948FE63-FEA3-EC20-36F8-87F5A6BAA541}"/>
+              </a:ext>
+            </a:extLst>
+          </p:cNvPr>
+          <p:cNvSpPr txBox="1"/>
+          <p:nvPr/>
+        </p:nvSpPr>
+        <p:spPr>
+          <a:xfrm>
+            <a:off x="731520" y="2044857"/>
+            <a:ext cx="5051272" cy="1323439"/>
+          </a:xfrm>
+          <a:prstGeom prst="rect">
+            <a:avLst/>
+          </a:prstGeom>
+          <a:noFill/>
+        </p:spPr>
+        <p:txBody>
+          <a:bodyPr wrap="square" rtlCol="0">
+            <a:spAutoFit/>
+          </a:bodyPr>
+          <a:lstStyle/>
+          <a:p>
+            <a:pPr marL="285750" indent="-285750">
+              <a:buFont typeface="Arial" panose="020B0604020202020204" pitchFamily="34" charset="0"/>
+              <a:buChar char="•"/>
+            </a:pPr>
+            <a:r>
+              <a:rPr lang="en-GB" sz="2000" b="1" dirty="0" err="1"/>
+              <a:t>Comprovar</a:t>
+            </a:r>
+            <a:r>
+              <a:rPr lang="en-GB" sz="2000" b="1" dirty="0"/>
+              <a:t> la </a:t>
+            </a:r>
+            <a:r>
+              <a:rPr lang="en-GB" sz="2000" b="1" dirty="0" err="1"/>
+              <a:t>viabilitat</a:t>
+            </a:r>
+            <a:r>
+              <a:rPr lang="en-GB" sz="2000" b="1" dirty="0"/>
+              <a:t> de la </a:t>
+            </a:r>
+            <a:r>
+              <a:rPr lang="en-GB" sz="2000" b="1" dirty="0" err="1"/>
+              <a:t>conversió</a:t>
+            </a:r>
+            <a:r>
+              <a:rPr lang="en-GB" sz="2000" b="1" dirty="0"/>
+              <a:t> </a:t>
+            </a:r>
+            <a:r>
+              <a:rPr lang="en-GB" sz="2000" b="1" dirty="0" err="1"/>
+              <a:t>d’una</a:t>
+            </a:r>
+            <a:r>
+              <a:rPr lang="en-GB" sz="2000" b="1" dirty="0"/>
+              <a:t> ANN a </a:t>
+            </a:r>
+            <a:r>
+              <a:rPr lang="en-GB" sz="2000" b="1" dirty="0" err="1"/>
+              <a:t>una</a:t>
+            </a:r>
+            <a:r>
+              <a:rPr lang="en-GB" sz="2000" b="1" dirty="0"/>
+              <a:t> SNN</a:t>
+            </a:r>
+            <a:r>
+              <a:rPr lang="en-GB" sz="2000" dirty="0"/>
+              <a:t> </a:t>
+            </a:r>
+            <a:r>
+              <a:rPr lang="en-GB" sz="2000" dirty="0" err="1"/>
+              <a:t>mantenint</a:t>
+            </a:r>
+            <a:r>
+              <a:rPr lang="en-GB" sz="2000" dirty="0"/>
+              <a:t> un </a:t>
+            </a:r>
+            <a:r>
+              <a:rPr lang="en-GB" sz="2000" dirty="0" err="1"/>
+              <a:t>comportament</a:t>
+            </a:r>
+            <a:r>
+              <a:rPr lang="en-GB" sz="2000" dirty="0"/>
+              <a:t> </a:t>
+            </a:r>
+            <a:r>
+              <a:rPr lang="en-GB" sz="2000" dirty="0" err="1"/>
+              <a:t>funcional</a:t>
+            </a:r>
+            <a:r>
+              <a:rPr lang="en-GB" sz="2000" dirty="0"/>
+              <a:t> similar.</a:t>
+            </a:r>
+          </a:p>
+        </p:txBody>
+      </p:sp>
+      <p:sp>
+        <p:nvSpPr>
+          <p:cNvPr id="17" name="QuadreDeText 16">
+            <a:extLst>
+              <a:ext uri="{FF2B5EF4-FFF2-40B4-BE49-F238E27FC236}">
+                <a16:creationId xmlns:a16="http://schemas.microsoft.com/office/drawing/2014/main" id="{214FAC04-5043-51E3-8A36-66C38962353F}"/>
+              </a:ext>
+            </a:extLst>
+          </p:cNvPr>
+          <p:cNvSpPr txBox="1"/>
+          <p:nvPr/>
+        </p:nvSpPr>
+        <p:spPr>
+          <a:xfrm>
+            <a:off x="6028734" y="2044857"/>
+            <a:ext cx="5629866" cy="1631216"/>
+          </a:xfrm>
+          <a:prstGeom prst="rect">
+            <a:avLst/>
+          </a:prstGeom>
+          <a:noFill/>
+        </p:spPr>
+        <p:txBody>
+          <a:bodyPr wrap="square" rtlCol="0">
+            <a:spAutoFit/>
+          </a:bodyPr>
+          <a:lstStyle/>
+          <a:p>
+            <a:pPr marL="285750" indent="-285750">
+              <a:buFont typeface="Arial" panose="020B0604020202020204" pitchFamily="34" charset="0"/>
+              <a:buChar char="•"/>
+            </a:pPr>
+            <a:r>
+              <a:rPr lang="en-GB" sz="2000" b="1" dirty="0" err="1"/>
+              <a:t>Avaluar</a:t>
+            </a:r>
+            <a:r>
+              <a:rPr lang="en-GB" sz="2000" b="1" dirty="0"/>
+              <a:t> </a:t>
+            </a:r>
+            <a:r>
+              <a:rPr lang="en-GB" sz="2000" b="1" dirty="0" err="1"/>
+              <a:t>si</a:t>
+            </a:r>
+            <a:r>
+              <a:rPr lang="en-GB" sz="2000" b="1" dirty="0"/>
+              <a:t> les SNNs </a:t>
+            </a:r>
+            <a:r>
+              <a:rPr lang="en-GB" sz="2000" b="1" dirty="0" err="1"/>
+              <a:t>poden</a:t>
+            </a:r>
+            <a:r>
+              <a:rPr lang="en-GB" sz="2000" b="1" dirty="0"/>
+              <a:t> </a:t>
+            </a:r>
+            <a:r>
+              <a:rPr lang="en-GB" sz="2000" b="1" dirty="0" err="1"/>
+              <a:t>constituir</a:t>
+            </a:r>
+            <a:r>
+              <a:rPr lang="en-GB" sz="2000" b="1" dirty="0"/>
+              <a:t> </a:t>
+            </a:r>
+            <a:r>
+              <a:rPr lang="en-GB" sz="2000" b="1" dirty="0" err="1"/>
+              <a:t>una</a:t>
+            </a:r>
+            <a:r>
+              <a:rPr lang="en-GB" sz="2000" b="1" dirty="0"/>
+              <a:t> </a:t>
+            </a:r>
+            <a:r>
+              <a:rPr lang="en-GB" sz="2000" b="1" dirty="0" err="1"/>
+              <a:t>alternativa</a:t>
+            </a:r>
+            <a:r>
+              <a:rPr lang="en-GB" sz="2000" b="1" dirty="0"/>
+              <a:t> </a:t>
+            </a:r>
+            <a:r>
+              <a:rPr lang="en-GB" sz="2000" b="1" dirty="0" err="1"/>
+              <a:t>prometedora</a:t>
+            </a:r>
+            <a:r>
+              <a:rPr lang="en-GB" sz="2000" b="1" dirty="0"/>
+              <a:t> a les ANNs</a:t>
+            </a:r>
+            <a:r>
+              <a:rPr lang="en-GB" sz="2000" dirty="0"/>
+              <a:t> </a:t>
+            </a:r>
+            <a:r>
+              <a:rPr lang="en-GB" sz="2000" dirty="0" err="1"/>
+              <a:t>en</a:t>
+            </a:r>
+            <a:r>
+              <a:rPr lang="en-GB" sz="2000" dirty="0"/>
+              <a:t> </a:t>
+            </a:r>
+            <a:r>
+              <a:rPr lang="en-GB" sz="2000" dirty="0" err="1"/>
+              <a:t>escenaris</a:t>
+            </a:r>
+            <a:r>
+              <a:rPr lang="en-GB" sz="2000" dirty="0"/>
+              <a:t> on </a:t>
+            </a:r>
+            <a:r>
+              <a:rPr lang="en-GB" sz="2000" dirty="0" err="1"/>
+              <a:t>l’eficiència</a:t>
+            </a:r>
+            <a:r>
+              <a:rPr lang="en-GB" sz="2000" dirty="0"/>
+              <a:t> </a:t>
+            </a:r>
+            <a:r>
+              <a:rPr lang="en-GB" sz="2000" dirty="0" err="1"/>
+              <a:t>energètica</a:t>
+            </a:r>
+            <a:r>
+              <a:rPr lang="en-GB" sz="2000" dirty="0"/>
+              <a:t> </a:t>
+            </a:r>
+            <a:r>
+              <a:rPr lang="en-GB" sz="2000" dirty="0" err="1"/>
+              <a:t>i</a:t>
+            </a:r>
+            <a:r>
+              <a:rPr lang="en-GB" sz="2000" dirty="0"/>
+              <a:t> </a:t>
+            </a:r>
+            <a:r>
+              <a:rPr lang="en-GB" sz="2000" dirty="0" err="1"/>
+              <a:t>el</a:t>
+            </a:r>
+            <a:r>
+              <a:rPr lang="en-GB" sz="2000" dirty="0"/>
+              <a:t> </a:t>
+            </a:r>
+            <a:r>
+              <a:rPr lang="en-GB" sz="2000" dirty="0" err="1"/>
+              <a:t>processament</a:t>
+            </a:r>
+            <a:r>
+              <a:rPr lang="en-GB" sz="2000" dirty="0"/>
+              <a:t> temporal </a:t>
+            </a:r>
+            <a:r>
+              <a:rPr lang="en-GB" sz="2000" dirty="0" err="1"/>
+              <a:t>són</a:t>
+            </a:r>
+            <a:r>
+              <a:rPr lang="en-GB" sz="2000" dirty="0"/>
+              <a:t> factors </a:t>
+            </a:r>
+            <a:r>
+              <a:rPr lang="en-GB" sz="2000" dirty="0" err="1"/>
+              <a:t>rellevants</a:t>
+            </a:r>
+            <a:r>
+              <a:rPr lang="en-GB" sz="2000" dirty="0"/>
+              <a:t>.</a:t>
+            </a:r>
+          </a:p>
+        </p:txBody>
+      </p:sp>
+      <p:sp>
+        <p:nvSpPr>
+          <p:cNvPr id="18" name="QuadreDeText 17">
+            <a:extLst>
+              <a:ext uri="{FF2B5EF4-FFF2-40B4-BE49-F238E27FC236}">
+                <a16:creationId xmlns:a16="http://schemas.microsoft.com/office/drawing/2014/main" id="{8CC0563D-4EE8-6DAB-B074-9D08FCB40E20}"/>
+              </a:ext>
+            </a:extLst>
+          </p:cNvPr>
+          <p:cNvSpPr txBox="1"/>
+          <p:nvPr/>
+        </p:nvSpPr>
+        <p:spPr>
+          <a:xfrm>
+            <a:off x="592783" y="4179168"/>
+            <a:ext cx="3455802" cy="369332"/>
+          </a:xfrm>
+          <a:prstGeom prst="rect">
+            <a:avLst/>
+          </a:prstGeom>
+          <a:noFill/>
+        </p:spPr>
+        <p:txBody>
+          <a:bodyPr wrap="square" rtlCol="0">
+            <a:spAutoFit/>
+          </a:bodyPr>
+          <a:lstStyle/>
+          <a:p>
+            <a:r>
+              <a:rPr lang="en-GB" b="1" dirty="0"/>
+              <a:t>Flow de </a:t>
+            </a:r>
+            <a:r>
+              <a:rPr lang="en-GB" b="1" dirty="0" err="1"/>
+              <a:t>treball</a:t>
+            </a:r>
+            <a:r>
+              <a:rPr lang="en-GB" b="1" dirty="0"/>
+              <a:t>:</a:t>
+            </a:r>
           </a:p>
         </p:txBody>
       </p:sp>
@@ -7791,6 +8035,36 @@
           <a:chExt cx="0" cy="0"/>
         </a:xfrm>
       </p:grpSpPr>
+      <p:pic>
+        <p:nvPicPr>
+          <p:cNvPr id="9" name="Imatge 8" descr="Imatge que conté text, diagrama, captura de pantalla, cercle&#10;&#10;Pot ser que el contingut generat per IA no sigui correcte.">
+            <a:extLst>
+              <a:ext uri="{FF2B5EF4-FFF2-40B4-BE49-F238E27FC236}">
+                <a16:creationId xmlns:a16="http://schemas.microsoft.com/office/drawing/2014/main" id="{EAB70FAA-C337-57BD-59B7-93A95936B12D}"/>
+              </a:ext>
+            </a:extLst>
+          </p:cNvPr>
+          <p:cNvPicPr>
+            <a:picLocks noChangeAspect="1"/>
+          </p:cNvPicPr>
+          <p:nvPr/>
+        </p:nvPicPr>
+        <p:blipFill>
+          <a:blip r:embed="rId3"/>
+          <a:stretch>
+            <a:fillRect/>
+          </a:stretch>
+        </p:blipFill>
+        <p:spPr>
+          <a:xfrm>
+            <a:off x="6585175" y="1908324"/>
+            <a:ext cx="4713971" cy="2010018"/>
+          </a:xfrm>
+          <a:prstGeom prst="rect">
+            <a:avLst/>
+          </a:prstGeom>
+        </p:spPr>
+      </p:pic>
       <p:sp>
         <p:nvSpPr>
           <p:cNvPr id="2" name="Text 0"/>
@@ -7894,30 +8168,6 @@
           </a:p>
         </p:txBody>
       </p:sp>
-      <p:pic>
-        <p:nvPicPr>
-          <p:cNvPr id="6" name="Image 0" descr="/mnt/data/tfg_assets/extracted/p17_img1.png"/>
-          <p:cNvPicPr>
-            <a:picLocks noChangeAspect="1"/>
-          </p:cNvPicPr>
-          <p:nvPr/>
-        </p:nvPicPr>
-        <p:blipFill>
-          <a:blip r:embed="rId3"/>
-          <a:stretch>
-            <a:fillRect/>
-          </a:stretch>
-        </p:blipFill>
-        <p:spPr>
-          <a:xfrm>
-            <a:off x="6678592" y="1639825"/>
-            <a:ext cx="4516612" cy="2489300"/>
-          </a:xfrm>
-          <a:prstGeom prst="rect">
-            <a:avLst/>
-          </a:prstGeom>
-        </p:spPr>
-      </p:pic>
       <p:sp>
         <p:nvSpPr>
           <p:cNvPr id="7" name="Text 4"/>
@@ -7996,8 +8246,8 @@
         </p:nvSpPr>
         <p:spPr>
           <a:xfrm>
-            <a:off x="1586959" y="4246473"/>
-            <a:ext cx="3291840" cy="146304"/>
+            <a:off x="1341017" y="4246473"/>
+            <a:ext cx="3713936" cy="146304"/>
           </a:xfrm>
           <a:prstGeom prst="rect">
             <a:avLst/>
@@ -8009,16 +8259,42 @@
           <a:bodyPr wrap="square" lIns="0" tIns="0" rIns="0" bIns="0" rtlCol="0" anchor="ctr"/>
           <a:lstStyle/>
           <a:p>
-            <a:pPr marL="0" indent="0" algn="ctr">
-              <a:buNone/>
-            </a:pPr>
+            <a:pPr algn="ctr"/>
             <a:r>
               <a:rPr lang="ca-ES" sz="750" noProof="0" dirty="0">
                 <a:solidFill>
                   <a:srgbClr val="6B7280"/>
                 </a:solidFill>
               </a:rPr>
-              <a:t>Model de neurona</a:t>
+              <a:t>Model de neurona de perceptró. </a:t>
+            </a:r>
+            <a:r>
+              <a:rPr lang="fr-FR" sz="800" dirty="0"/>
+              <a:t>Font: F. </a:t>
+            </a:r>
+            <a:r>
+              <a:rPr lang="fr-FR" sz="800" dirty="0" err="1"/>
+              <a:t>Rosenblatt</a:t>
+            </a:r>
+            <a:r>
+              <a:rPr lang="fr-FR" sz="800" dirty="0"/>
+              <a:t>, </a:t>
+            </a:r>
+            <a:r>
+              <a:rPr lang="fr-FR" sz="800" i="1" dirty="0" err="1"/>
+              <a:t>Psychological</a:t>
+            </a:r>
+            <a:r>
+              <a:rPr lang="fr-FR" sz="800" i="1" dirty="0"/>
+              <a:t> </a:t>
+            </a:r>
+            <a:r>
+              <a:rPr lang="fr-FR" sz="800" i="1" dirty="0" err="1"/>
+              <a:t>Review</a:t>
+            </a:r>
+            <a:r>
+              <a:rPr lang="fr-FR" sz="800" dirty="0"/>
+              <a:t>, 1958.</a:t>
             </a:r>
             <a:endParaRPr lang="ca-ES" sz="750" noProof="0" dirty="0"/>
           </a:p>
@@ -8488,12 +8764,20 @@
               <a:buNone/>
             </a:pPr>
             <a:r>
+              <a:rPr lang="ca-ES" sz="1200" noProof="0" dirty="0">
+                <a:solidFill>
+                  <a:srgbClr val="6B7280"/>
+                </a:solidFill>
+              </a:rPr>
+              <a:t>05</a:t>
+            </a:r>
+            <a:r>
               <a:rPr lang="ca-ES" sz="700" noProof="0" dirty="0">
                 <a:solidFill>
                   <a:srgbClr val="6B7280"/>
                 </a:solidFill>
               </a:rPr>
-              <a:t>05 </a:t>
+              <a:t> </a:t>
             </a:r>
           </a:p>
         </p:txBody>
@@ -8827,16 +9111,26 @@
           <a:bodyPr wrap="square" lIns="0" tIns="0" rIns="0" bIns="0" rtlCol="0" anchor="ctr"/>
           <a:lstStyle/>
           <a:p>
-            <a:pPr marL="0" indent="0" algn="ctr">
-              <a:buNone/>
-            </a:pPr>
+            <a:pPr algn="ctr"/>
             <a:r>
               <a:rPr lang="ca-ES" sz="750" noProof="0" dirty="0">
                 <a:solidFill>
                   <a:srgbClr val="6B7280"/>
                 </a:solidFill>
               </a:rPr>
-              <a:t>Model de neurona</a:t>
+              <a:t>Model de neurona. </a:t>
+            </a:r>
+            <a:r>
+              <a:rPr lang="en-GB" sz="800" dirty="0"/>
+              <a:t>Font: L. </a:t>
+            </a:r>
+            <a:r>
+              <a:rPr lang="en-GB" sz="800" dirty="0" err="1"/>
+              <a:t>Lapicque</a:t>
+            </a:r>
+            <a:r>
+              <a:rPr lang="en-GB" sz="800" dirty="0"/>
+              <a:t>, 1907.</a:t>
             </a:r>
             <a:endParaRPr lang="ca-ES" sz="750" noProof="0" dirty="0"/>
           </a:p>
@@ -9378,12 +9672,20 @@
               <a:buNone/>
             </a:pPr>
             <a:r>
+              <a:rPr lang="ca-ES" sz="1200" noProof="0" dirty="0">
+                <a:solidFill>
+                  <a:srgbClr val="6B7280"/>
+                </a:solidFill>
+              </a:rPr>
+              <a:t>06</a:t>
+            </a:r>
+            <a:r>
               <a:rPr lang="ca-ES" sz="700" noProof="0" dirty="0">
                 <a:solidFill>
                   <a:srgbClr val="6B7280"/>
                 </a:solidFill>
               </a:rPr>
-              <a:t>06 </a:t>
+              <a:t> </a:t>
             </a:r>
           </a:p>
         </p:txBody>
@@ -9515,16 +9817,18 @@
           <a:bodyPr wrap="square" lIns="0" tIns="0" rIns="0" bIns="0" rtlCol="0" anchor="ctr"/>
           <a:lstStyle/>
           <a:p>
-            <a:pPr marL="0" indent="0" algn="ctr">
-              <a:buNone/>
-            </a:pPr>
+            <a:pPr algn="ctr"/>
             <a:r>
               <a:rPr lang="ca-ES" sz="750" noProof="0" dirty="0">
                 <a:solidFill>
                   <a:srgbClr val="6B7280"/>
                 </a:solidFill>
               </a:rPr>
-              <a:t>Codificació per taxa</a:t>
+              <a:t>Tipus de codificació. </a:t>
+            </a:r>
+            <a:r>
+              <a:rPr lang="fr-FR" sz="800" dirty="0"/>
+              <a:t>Font: C. Zhao et al., 2017.</a:t>
             </a:r>
             <a:endParaRPr lang="ca-ES" sz="750" noProof="0" dirty="0"/>
           </a:p>
@@ -9910,14 +10214,14 @@
               <a:buNone/>
             </a:pPr>
             <a:r>
-              <a:rPr lang="ca-ES" sz="700" noProof="0" dirty="0">
+              <a:rPr lang="ca-ES" sz="1200" noProof="0" dirty="0">
                 <a:solidFill>
                   <a:srgbClr val="6B7280"/>
                 </a:solidFill>
               </a:rPr>
               <a:t>07</a:t>
             </a:r>
-            <a:endParaRPr lang="ca-ES" sz="700" noProof="0" dirty="0"/>
+            <a:endParaRPr lang="ca-ES" sz="1200" noProof="0" dirty="0"/>
           </a:p>
         </p:txBody>
       </p:sp>
@@ -11363,14 +11667,14 @@
               <a:buNone/>
             </a:pPr>
             <a:r>
-              <a:rPr lang="ca-ES" sz="700" noProof="0" dirty="0">
+              <a:rPr lang="ca-ES" sz="1200" noProof="0" dirty="0">
                 <a:solidFill>
                   <a:srgbClr val="6B7280"/>
                 </a:solidFill>
               </a:rPr>
               <a:t>08</a:t>
             </a:r>
-            <a:endParaRPr lang="ca-ES" sz="700" noProof="0" dirty="0"/>
+            <a:endParaRPr lang="ca-ES" sz="1200" noProof="0" dirty="0"/>
           </a:p>
         </p:txBody>
       </p:sp>
@@ -11484,7 +11788,7 @@
         </p:nvSpPr>
         <p:spPr>
           <a:xfrm>
-            <a:off x="345264" y="2278782"/>
+            <a:off x="383100" y="1914203"/>
             <a:ext cx="3728896" cy="3029818"/>
           </a:xfrm>
           <a:prstGeom prst="rect">
@@ -11526,7 +11830,7 @@
         </p:blipFill>
         <p:spPr>
           <a:xfrm>
-            <a:off x="383100" y="2315358"/>
+            <a:off x="420936" y="1950779"/>
             <a:ext cx="3660646" cy="2956442"/>
           </a:xfrm>
           <a:prstGeom prst="rect">
@@ -11542,7 +11846,7 @@
         </p:nvSpPr>
         <p:spPr>
           <a:xfrm>
-            <a:off x="477870" y="5370119"/>
+            <a:off x="515706" y="5005540"/>
             <a:ext cx="3463684" cy="199591"/>
           </a:xfrm>
           <a:prstGeom prst="rect">
@@ -11578,7 +11882,7 @@
         </p:nvSpPr>
         <p:spPr>
           <a:xfrm>
-            <a:off x="4343400" y="2278781"/>
+            <a:off x="4381236" y="1914202"/>
             <a:ext cx="3657600" cy="3029819"/>
           </a:xfrm>
           <a:prstGeom prst="rect">
@@ -11620,7 +11924,7 @@
         </p:blipFill>
         <p:spPr>
           <a:xfrm>
-            <a:off x="4387818" y="2315357"/>
+            <a:off x="4425654" y="1950778"/>
             <a:ext cx="3568518" cy="2956443"/>
           </a:xfrm>
           <a:prstGeom prst="rect">
@@ -11636,7 +11940,7 @@
         </p:nvSpPr>
         <p:spPr>
           <a:xfrm>
-            <a:off x="4298736" y="5360416"/>
+            <a:off x="4336572" y="4995837"/>
             <a:ext cx="3657600" cy="146304"/>
           </a:xfrm>
           <a:prstGeom prst="rect">
@@ -11672,7 +11976,7 @@
         </p:nvSpPr>
         <p:spPr>
           <a:xfrm>
-            <a:off x="8732520" y="2742018"/>
+            <a:off x="8732520" y="4506354"/>
             <a:ext cx="2468880" cy="2103120"/>
           </a:xfrm>
           <a:prstGeom prst="rect">
@@ -11805,17 +12109,47 @@
               <a:buNone/>
             </a:pPr>
             <a:r>
-              <a:rPr lang="ca-ES" sz="700" noProof="0" dirty="0">
+              <a:rPr lang="ca-ES" sz="1200" noProof="0" dirty="0">
                 <a:solidFill>
                   <a:srgbClr val="6B7280"/>
                 </a:solidFill>
               </a:rPr>
               <a:t>09</a:t>
             </a:r>
-            <a:endParaRPr lang="ca-ES" sz="700" noProof="0" dirty="0"/>
-          </a:p>
-        </p:txBody>
-      </p:sp>
+            <a:endParaRPr lang="ca-ES" sz="1200" noProof="0" dirty="0"/>
+          </a:p>
+        </p:txBody>
+      </p:sp>
+      <p:pic>
+        <p:nvPicPr>
+          <p:cNvPr id="12" name="Imatge 11" descr="Imatge que conté diagrama, cercle, línia, captura de pantalla&#10;&#10;Pot ser que el contingut generat per IA no sigui correcte.">
+            <a:extLst>
+              <a:ext uri="{FF2B5EF4-FFF2-40B4-BE49-F238E27FC236}">
+                <a16:creationId xmlns:a16="http://schemas.microsoft.com/office/drawing/2014/main" id="{D0EC216E-0E16-A00C-E087-F1065193DF1E}"/>
+              </a:ext>
+            </a:extLst>
+          </p:cNvPr>
+          <p:cNvPicPr>
+            <a:picLocks noChangeAspect="1"/>
+          </p:cNvPicPr>
+          <p:nvPr/>
+        </p:nvPicPr>
+        <p:blipFill>
+          <a:blip r:embed="rId5"/>
+          <a:stretch>
+            <a:fillRect/>
+          </a:stretch>
+        </p:blipFill>
+        <p:spPr>
+          <a:xfrm>
+            <a:off x="8395484" y="1124376"/>
+            <a:ext cx="3142952" cy="3286085"/>
+          </a:xfrm>
+          <a:prstGeom prst="rect">
+            <a:avLst/>
+          </a:prstGeom>
+        </p:spPr>
+      </p:pic>
     </p:spTree>
   </p:cSld>
   <p:clrMapOvr>
